--- a/docs/week-5/cen429-week-5-sunum.en.pptx
+++ b/docs/week-5/cen429-week-5-sunum.en.pptx
@@ -695,76 +695,6 @@
 </p:notes>
 </file>
 
-<file path=ppt/notesSlides/notesSlide10.xml><?xml version="1.0" encoding="utf-8"?>
-<p:notes xmlns:a="http://schemas.openxmlformats.org/drawingml/2006/main" xmlns:p="http://schemas.openxmlformats.org/presentationml/2006/main" xmlns:r="http://schemas.openxmlformats.org/officeDocument/2006/relationships">
-  <p:cSld>
-    <p:spTree>
-      <p:nvGrpSpPr>
-        <p:cNvPr id="1" name=""/>
-        <p:cNvGrpSpPr/>
-        <p:nvPr/>
-      </p:nvGrpSpPr>
-      <p:grpSpPr>
-        <a:xfrm>
-          <a:off x="0" y="0"/>
-          <a:ext cx="0" cy="0"/>
-          <a:chOff x="0" y="0"/>
-          <a:chExt cx="0" cy="0"/>
-        </a:xfrm>
-      </p:grpSpPr>
-      <p:sp>
-        <p:nvSpPr>
-          <p:cNvPr id="2" name="Slide Image Placeholder 1"/>
-          <p:cNvSpPr>
-            <a:spLocks noGrp="1"/>
-          </p:cNvSpPr>
-          <p:nvPr>
-            <p:ph type="sldImg" idx="2"/>
-          </p:nvPr>
-        </p:nvSpPr>
-        <p:spPr/>
-      </p:sp>
-      <p:sp>
-        <p:nvSpPr>
-          <p:cNvPr id="3" name="Notes Placeholder 2"/>
-          <p:cNvSpPr>
-            <a:spLocks noGrp="1"/>
-          </p:cNvSpPr>
-          <p:nvPr>
-            <p:ph type="body" idx="3" sz="quarter"/>
-          </p:nvPr>
-        </p:nvSpPr>
-        <p:spPr/>
-        <p:txBody>
-          <a:bodyPr/>
-          <a:lstStyle/>
-          <a:p>
-            <a:r>
-              <a:t>Tek bir SQL enjeksiyonunu hatalı koddan saldırıya, düzeltmeye ve katmanlı savunmaya kadar izliyoruz.</a:t>
-            </a:r>
-          </a:p>
-        </p:txBody>
-      </p:sp>
-      <p:sp>
-        <p:nvSpPr>
-          <p:cNvPr id="4" name="Slide Number Placeholder 3"/>
-          <p:cNvSpPr>
-            <a:spLocks noGrp="1"/>
-          </p:cNvSpPr>
-          <p:nvPr>
-            <p:ph type="sldNum" idx="5" sz="quarter"/>
-          </p:nvPr>
-        </p:nvSpPr>
-        <p:spPr/>
-      </p:sp>
-    </p:spTree>
-  </p:cSld>
-  <p:clrMapOvr>
-    <a:masterClrMapping/>
-  </p:clrMapOvr>
-</p:notes>
-</file>
-
 <file path=ppt/notesSlides/notesSlide2.xml><?xml version="1.0" encoding="utf-8"?>
 <p:notes xmlns:a="http://schemas.openxmlformats.org/drawingml/2006/main" xmlns:p="http://schemas.openxmlformats.org/presentationml/2006/main" xmlns:r="http://schemas.openxmlformats.org/officeDocument/2006/relationships">
   <p:cSld>
@@ -950,13 +880,7 @@
           <a:lstStyle/>
           <a:p>
             <a:r>
-              <a:t>kötü yol</a:t>
-            </a:r>
-          </a:p>
-          <a:p/>
-          <a:p>
-            <a:r>
-              <a:t>iyi yol</a:t>
+              <a:t>Sonra SQL enjeksiyonu.</a:t>
             </a:r>
           </a:p>
         </p:txBody>
@@ -1026,7 +950,7 @@
           <a:lstStyle/>
           <a:p>
             <a:r>
-              <a:t>Sonra SQL enjeksiyonu.</a:t>
+              <a:t>Sonra seri durumdan çıkarma ve XML.</a:t>
             </a:r>
           </a:p>
         </p:txBody>
@@ -1096,7 +1020,7 @@
           <a:lstStyle/>
           <a:p>
             <a:r>
-              <a:t>Sonra seri durumdan çıkarma ve XML.</a:t>
+              <a:t>Sonra bayt kodu ve gizleme.</a:t>
             </a:r>
           </a:p>
         </p:txBody>
@@ -1166,7 +1090,7 @@
           <a:lstStyle/>
           <a:p>
             <a:r>
-              <a:t>Sonra bayt kodu ve gizleme.</a:t>
+              <a:t>Sonra SBOM ve bağımlılık güvenliği.</a:t>
             </a:r>
           </a:p>
         </p:txBody>
@@ -1236,7 +1160,7 @@
           <a:lstStyle/>
           <a:p>
             <a:r>
-              <a:t>Sonra SBOM ve bağımlılık güvenliği.</a:t>
+              <a:t>Sonra proje ve çözümlü sınama.</a:t>
             </a:r>
           </a:p>
         </p:txBody>
@@ -1306,7 +1230,7 @@
           <a:lstStyle/>
           <a:p>
             <a:r>
-              <a:t>Sonra proje ve çözümlü sınama.</a:t>
+              <a:t>Tek bir SQL enjeksiyonunu hatalı koddan saldırıya, düzeltmeye ve katmanlı savunmaya kadar izliyoruz.</a:t>
             </a:r>
           </a:p>
         </p:txBody>
@@ -27463,108 +27387,30 @@
           </a:p>
         </p:txBody>
       </p:sp>
-      <p:sp>
-        <p:nvSpPr>
-          <p:cNvPr id="7" name="TextBox 6"/>
-          <p:cNvSpPr txBox="1"/>
-          <p:nvPr/>
-        </p:nvSpPr>
-        <p:spPr>
-          <a:xfrm>
-            <a:off x="640080" y="1325880"/>
-            <a:ext cx="10911535" cy="753618"/>
-          </a:xfrm>
-          <a:prstGeom prst="rect">
-            <a:avLst/>
-          </a:prstGeom>
-          <a:noFill/>
-        </p:spPr>
-        <p:txBody>
-          <a:bodyPr wrap="square" lIns="45720" rIns="45720">
-            <a:spAutoFit/>
-          </a:bodyPr>
-          <a:lstStyle/>
-          <a:p>
-            <a:pPr algn="l"/>
-            <a:r>
-              <a:rPr sz="1300" b="0">
-                <a:solidFill>
-                  <a:srgbClr val="1F2D3A"/>
-                </a:solidFill>
-              </a:rPr>
-              <a:t>&lt;svg viewBox="0 0 940 300" style="width:96%;height:auto;display:block;margin:2px auto" font-family="sans-serif"&gt; &lt;rect x="20" y="30" width="150" height="52" rx="8" fill="#fdeaea" stroke="#c0392b"/&gt;&lt;text x="95" y="55" text-anchor="middle" font-size="14" fill="#a01f1f"&gt;güvenilmeyen&lt;/text&gt;&lt;text x="95" y="73" text-anchor="middle" font-size="14" fill="#a01f1f"&gt;girdi&lt;/text&gt;</a:t>
-            </a:r>
-          </a:p>
-        </p:txBody>
-      </p:sp>
-      <p:sp>
-        <p:nvSpPr>
-          <p:cNvPr id="8" name="TextBox 7"/>
-          <p:cNvSpPr txBox="1"/>
-          <p:nvPr/>
-        </p:nvSpPr>
-        <p:spPr>
-          <a:xfrm>
-            <a:off x="640080" y="2189226"/>
-            <a:ext cx="10911535" cy="1397508"/>
-          </a:xfrm>
-          <a:prstGeom prst="rect">
-            <a:avLst/>
-          </a:prstGeom>
-          <a:noFill/>
-        </p:spPr>
-        <p:txBody>
-          <a:bodyPr wrap="square" lIns="45720" rIns="45720">
-            <a:spAutoFit/>
-          </a:bodyPr>
-          <a:lstStyle/>
-          <a:p>
-            <a:pPr algn="l"/>
-            <a:r>
-              <a:rPr sz="1300" b="0">
-                <a:solidFill>
-                  <a:srgbClr val="1F2D3A"/>
-                </a:solidFill>
-              </a:rPr>
-              <a:t>&lt;line x1="170" y1="70" x2="330" y2="95" stroke="#c0392b" stroke-width="3" marker-end="url(#a5)"/&gt; &lt;rect x="330" y="70" width="260" height="52" rx="8" fill="#fdeaea" stroke="#c0392b" stroke-width="2"/&gt;&lt;text x="460" y="92" text-anchor="middle" font-size="14"&gt;dize birleştirme:&lt;/text&gt;&lt;text x="460" y="112" text-anchor="middle" font-size="14" font-family="monospace"&gt;"...WHERE x='" + girdi&lt;/text&gt; &lt;line x1="590" y1="96" x2="720" y2="96" stroke="#c0392b" stroke-width="3" marker-end="url(#a5)"/&gt; &lt;rect x="720" y="66" width="200" height="62" rx="8" fill="#c0392b"/&gt;&lt;text x="820" y="92" text-anchor="middle" font-size="15" fill="#fff" font-weight="bold"&gt;girdi KOD olur&lt;/text&gt;&lt;text x="820" y="113" text-anchor="middle" font-size="13" fill="#fff"&gt;SQLi / RCE / XXE&lt;/text&gt;</a:t>
-            </a:r>
-          </a:p>
-        </p:txBody>
-      </p:sp>
-      <p:sp>
-        <p:nvSpPr>
-          <p:cNvPr id="9" name="TextBox 8"/>
-          <p:cNvSpPr txBox="1"/>
-          <p:nvPr/>
-        </p:nvSpPr>
-        <p:spPr>
-          <a:xfrm>
-            <a:off x="640080" y="3696462"/>
-            <a:ext cx="10911535" cy="2256028"/>
-          </a:xfrm>
-          <a:prstGeom prst="rect">
-            <a:avLst/>
-          </a:prstGeom>
-          <a:noFill/>
-        </p:spPr>
-        <p:txBody>
-          <a:bodyPr wrap="square" lIns="45720" rIns="45720">
-            <a:spAutoFit/>
-          </a:bodyPr>
-          <a:lstStyle/>
-          <a:p>
-            <a:pPr algn="l"/>
-            <a:r>
-              <a:rPr sz="1300" b="0">
-                <a:solidFill>
-                  <a:srgbClr val="1F2D3A"/>
-                </a:solidFill>
-              </a:rPr>
-              <a:t>&lt;line x1="170" y1="70" x2="330" y2="210" stroke="#2e7d32" stroke-width="3" marker-end="url(#g5)"/&gt; &lt;rect x="330" y="185" width="260" height="52" rx="8" fill="#eaf4ea" stroke="#2e7d32" stroke-width="2"/&gt;&lt;text x="460" y="207" text-anchor="middle" font-size="14"&gt;parametreli sorgu /&lt;/text&gt;&lt;text x="460" y="227" text-anchor="middle" font-size="14"&gt;argüman dizisi (? yer tutucu)&lt;/text&gt; &lt;line x1="590" y1="211" x2="720" y2="211" stroke="#2e7d32" stroke-width="3" marker-end="url(#g5)"/&gt; &lt;rect x="720" y="181" width="200" height="62" rx="8" fill="#2e7d32"/&gt;&lt;text x="820" y="207" text-anchor="middle" font-size="15" fill="#fff" font-weight="bold"&gt;girdi VERİ kalır&lt;/text&gt;&lt;text x="820" y="228" text-anchor="middle" font-size="13" fill="#fff"&gt;güvenli&lt;/text&gt; &lt;text x="460" y="275" text-anchor="middle" font-size="15" fill="#555"&gt;Tek kök: veri ile kodu ayrı kanalda tut → enjeksiyon kapanır.&lt;/text&gt; &lt;defs&gt; &lt;marker id="a5" markerWidth="9" markerHeight="9" refX="7" refY="3" orient="auto"&gt;&lt;path d="M0,0 L7,3 L0,6 Z" fill="#c0392b"/&gt;&lt;/marker&gt; &lt;marker id="g5" markerWidth="9" markerHeight="9" refX="7" refY="3" orient="auto"&gt;&lt;path d="M0,0 L7,3 L0,6 Z" fill="#2e7d32"/&gt;&lt;/marker&gt; &lt;/defs&gt; &lt;/svg&gt;</a:t>
-            </a:r>
-          </a:p>
-        </p:txBody>
-      </p:sp>
+      <p:pic>
+        <p:nvPicPr>
+          <p:cNvPr id="7" name="Picture 6" descr="h05-01-enjeksiyon-koku.png"/>
+          <p:cNvPicPr>
+            <a:picLocks noChangeAspect="1"/>
+          </p:cNvPicPr>
+          <p:nvPr/>
+        </p:nvPicPr>
+        <p:blipFill>
+          <a:blip r:embed="rId3"/>
+          <a:stretch>
+            <a:fillRect/>
+          </a:stretch>
+        </p:blipFill>
+        <p:spPr>
+          <a:xfrm>
+            <a:off x="1833529" y="1325880"/>
+            <a:ext cx="8524636" cy="3656608"/>
+          </a:xfrm>
+          <a:prstGeom prst="rect">
+            <a:avLst/>
+          </a:prstGeom>
+        </p:spPr>
+      </p:pic>
     </p:spTree>
   </p:cSld>
   <p:clrMapOvr>
